--- a/docs_detailed/TizenClaw_First_Principles.pptx
+++ b/docs_detailed/TizenClaw_First_Principles.pptx
@@ -8884,8 +8884,8 @@
             <a:solidFill>
               <a:srgbClr val="3C7D4E"/>
             </a:solidFill>
+            <a:prstDash val="dash"/>
             <a:tailEnd type="triangle" w="med" h="med"/>
-            <a:prstDash val="dash"/>
           </a:ln>
         </p:spPr>
         <p:style>

--- a/docs_detailed/TizenClaw_First_Principles.pptx
+++ b/docs_detailed/TizenClaw_First_Principles.pptx
@@ -8839,7 +8839,7 @@
         <p:spPr>
           <a:xfrm>
             <a:off x="1980000" y="4212000"/>
-            <a:ext cx="0" cy="288000"/>
+            <a:ext cx="1" cy="288000"/>
           </a:xfrm>
           <a:prstGeom prst="line">
             <a:avLst/>
